--- a/tmp-tj/261027_tajplast_audit-presence-en-ligne_v1.pptx
+++ b/tmp-tj/261027_tajplast_audit-presence-en-ligne_v1.pptx
@@ -3957,7 +3957,7 @@
       </p:sp>
       <p:pic>
         <p:nvPicPr>
-          <p:cNvPr id="11" name="Picture 10" descr="l_plastica.png"/>
+          <p:cNvPr id="11" name="Picture 10" descr="l_plastica_c.png"/>
           <p:cNvPicPr>
             <a:picLocks noChangeAspect="1"/>
           </p:cNvPicPr>
@@ -3971,8 +3971,8 @@
         </p:blipFill>
         <p:spPr>
           <a:xfrm>
-            <a:off x="1835999" y="1692000"/>
-            <a:ext cx="792000" cy="792000"/>
+            <a:off x="999999" y="1692000"/>
+            <a:ext cx="2464000" cy="792000"/>
           </a:xfrm>
           <a:prstGeom prst="rect">
             <a:avLst/>
@@ -5790,7 +5790,7 @@
               </a:lnSpc>
             </a:pPr>
             <a:r>
-              <a:rPr sz="1700" b="1">
+              <a:rPr sz="1500" b="1">
                 <a:solidFill>
                   <a:srgbClr val="FFFFFF"/>
                 </a:solidFill>
@@ -6130,7 +6130,7 @@
               </a:lnSpc>
             </a:pPr>
             <a:r>
-              <a:rPr sz="1700" b="1">
+              <a:rPr sz="1500" b="1">
                 <a:solidFill>
                   <a:srgbClr val="FFFFFF"/>
                 </a:solidFill>
@@ -6470,13 +6470,13 @@
               </a:lnSpc>
             </a:pPr>
             <a:r>
-              <a:rPr sz="1700" b="1">
+              <a:rPr sz="1500" b="1">
                 <a:solidFill>
                   <a:srgbClr val="FFFFFF"/>
                 </a:solidFill>
                 <a:latin typeface="Arial"/>
               </a:rPr>
-              <a:t>LinkedIn pour les distributeurs</a:t>
+              <a:t>LinkedIn, vitrine pro</a:t>
             </a:r>
           </a:p>
         </p:txBody>
@@ -9182,7 +9182,7 @@
         <p:spPr>
           <a:xfrm>
             <a:off x="792000" y="4896000"/>
-            <a:ext cx="2160000" cy="288000"/>
+            <a:ext cx="7200000" cy="288000"/>
           </a:xfrm>
           <a:prstGeom prst="rect">
             <a:avLst/>
@@ -16932,7 +16932,7 @@
             <a:avLst/>
           </a:prstGeom>
           <a:solidFill>
-            <a:srgbClr val="F4F4F2"/>
+            <a:srgbClr val="111111"/>
           </a:solidFill>
           <a:ln>
             <a:noFill/>

--- a/tmp-tj/261027_tajplast_audit-presence-en-ligne_v1.pptx
+++ b/tmp-tj/261027_tajplast_audit-presence-en-ligne_v1.pptx
@@ -3382,7 +3382,7 @@
       </p:sp>
       <p:pic>
         <p:nvPicPr>
-          <p:cNvPr id="5" name="Picture 4" descr="cropped-logo-tajplast.png"/>
+          <p:cNvPr id="5" name="Picture 4" descr="logo-taj-seul.png"/>
           <p:cNvPicPr>
             <a:picLocks noChangeAspect="1"/>
           </p:cNvPicPr>
@@ -3396,8 +3396,8 @@
         </p:blipFill>
         <p:spPr>
           <a:xfrm>
-            <a:off x="785613" y="792000"/>
-            <a:ext cx="2460774" cy="936000"/>
+            <a:off x="756000" y="909571"/>
+            <a:ext cx="2520000" cy="700858"/>
           </a:xfrm>
           <a:prstGeom prst="rect">
             <a:avLst/>
@@ -3689,7 +3689,7 @@
       </p:sp>
       <p:pic>
         <p:nvPicPr>
-          <p:cNvPr id="4" name="Picture 3" descr="cropped-logo-tajplast.png"/>
+          <p:cNvPr id="4" name="Picture 3" descr="logo-taj-seul.png"/>
           <p:cNvPicPr>
             <a:picLocks noChangeAspect="1"/>
           </p:cNvPicPr>
@@ -3703,8 +3703,8 @@
         </p:blipFill>
         <p:spPr>
           <a:xfrm>
-            <a:off x="10248119" y="220748"/>
-            <a:ext cx="1584000" cy="602503"/>
+            <a:off x="10248119" y="283729"/>
+            <a:ext cx="1584000" cy="440539"/>
           </a:xfrm>
           <a:prstGeom prst="rect">
             <a:avLst/>
@@ -4576,7 +4576,7 @@
       </p:sp>
       <p:pic>
         <p:nvPicPr>
-          <p:cNvPr id="4" name="Picture 3" descr="cropped-logo-tajplast.png"/>
+          <p:cNvPr id="4" name="Picture 3" descr="logo-taj-seul.png"/>
           <p:cNvPicPr>
             <a:picLocks noChangeAspect="1"/>
           </p:cNvPicPr>
@@ -4590,8 +4590,8 @@
         </p:blipFill>
         <p:spPr>
           <a:xfrm>
-            <a:off x="10248119" y="220748"/>
-            <a:ext cx="1584000" cy="602503"/>
+            <a:off x="10248119" y="283729"/>
+            <a:ext cx="1584000" cy="440539"/>
           </a:xfrm>
           <a:prstGeom prst="rect">
             <a:avLst/>
@@ -5413,7 +5413,7 @@
       </p:sp>
       <p:pic>
         <p:nvPicPr>
-          <p:cNvPr id="4" name="Picture 3" descr="cropped-logo-tajplast.png"/>
+          <p:cNvPr id="4" name="Picture 3" descr="logo-taj-seul.png"/>
           <p:cNvPicPr>
             <a:picLocks noChangeAspect="1"/>
           </p:cNvPicPr>
@@ -5427,8 +5427,8 @@
         </p:blipFill>
         <p:spPr>
           <a:xfrm>
-            <a:off x="10248119" y="220748"/>
-            <a:ext cx="1584000" cy="602503"/>
+            <a:off x="10248119" y="283729"/>
+            <a:ext cx="1584000" cy="440539"/>
           </a:xfrm>
           <a:prstGeom prst="rect">
             <a:avLst/>
@@ -6763,7 +6763,7 @@
       </p:sp>
       <p:pic>
         <p:nvPicPr>
-          <p:cNvPr id="4" name="Picture 3" descr="cropped-logo-tajplast.png"/>
+          <p:cNvPr id="4" name="Picture 3" descr="logo-taj-seul.png"/>
           <p:cNvPicPr>
             <a:picLocks noChangeAspect="1"/>
           </p:cNvPicPr>
@@ -6777,8 +6777,8 @@
         </p:blipFill>
         <p:spPr>
           <a:xfrm>
-            <a:off x="10248119" y="220748"/>
-            <a:ext cx="1584000" cy="602503"/>
+            <a:off x="10248119" y="283729"/>
+            <a:ext cx="1584000" cy="440539"/>
           </a:xfrm>
           <a:prstGeom prst="rect">
             <a:avLst/>
@@ -7717,7 +7717,7 @@
       </p:sp>
       <p:pic>
         <p:nvPicPr>
-          <p:cNvPr id="4" name="Picture 3" descr="cropped-logo-tajplast.png"/>
+          <p:cNvPr id="4" name="Picture 3" descr="logo-taj-seul.png"/>
           <p:cNvPicPr>
             <a:picLocks noChangeAspect="1"/>
           </p:cNvPicPr>
@@ -7731,8 +7731,8 @@
         </p:blipFill>
         <p:spPr>
           <a:xfrm>
-            <a:off x="10248119" y="220748"/>
-            <a:ext cx="1584000" cy="602503"/>
+            <a:off x="10248119" y="283729"/>
+            <a:ext cx="1584000" cy="440539"/>
           </a:xfrm>
           <a:prstGeom prst="rect">
             <a:avLst/>
@@ -8292,7 +8292,7 @@
       </p:sp>
       <p:pic>
         <p:nvPicPr>
-          <p:cNvPr id="4" name="Picture 3" descr="cropped-logo-tajplast.png"/>
+          <p:cNvPr id="4" name="Picture 3" descr="logo-taj-seul.png"/>
           <p:cNvPicPr>
             <a:picLocks noChangeAspect="1"/>
           </p:cNvPicPr>
@@ -8306,8 +8306,8 @@
         </p:blipFill>
         <p:spPr>
           <a:xfrm>
-            <a:off x="10248119" y="220748"/>
-            <a:ext cx="1584000" cy="602503"/>
+            <a:off x="10248119" y="283729"/>
+            <a:ext cx="1584000" cy="440539"/>
           </a:xfrm>
           <a:prstGeom prst="rect">
             <a:avLst/>
@@ -9359,7 +9359,7 @@
       </p:sp>
       <p:pic>
         <p:nvPicPr>
-          <p:cNvPr id="4" name="Picture 3" descr="cropped-logo-tajplast.png"/>
+          <p:cNvPr id="4" name="Picture 3" descr="logo-taj-seul.png"/>
           <p:cNvPicPr>
             <a:picLocks noChangeAspect="1"/>
           </p:cNvPicPr>
@@ -9373,8 +9373,8 @@
         </p:blipFill>
         <p:spPr>
           <a:xfrm>
-            <a:off x="10248119" y="220748"/>
-            <a:ext cx="1584000" cy="602503"/>
+            <a:off x="10248119" y="283729"/>
+            <a:ext cx="1584000" cy="440539"/>
           </a:xfrm>
           <a:prstGeom prst="rect">
             <a:avLst/>
@@ -10301,7 +10301,7 @@
       </p:sp>
       <p:pic>
         <p:nvPicPr>
-          <p:cNvPr id="4" name="Picture 3" descr="cropped-logo-tajplast.png"/>
+          <p:cNvPr id="4" name="Picture 3" descr="logo-taj-seul.png"/>
           <p:cNvPicPr>
             <a:picLocks noChangeAspect="1"/>
           </p:cNvPicPr>
@@ -10315,8 +10315,8 @@
         </p:blipFill>
         <p:spPr>
           <a:xfrm>
-            <a:off x="10248119" y="220748"/>
-            <a:ext cx="1584000" cy="602503"/>
+            <a:off x="10248119" y="283729"/>
+            <a:ext cx="1584000" cy="440539"/>
           </a:xfrm>
           <a:prstGeom prst="rect">
             <a:avLst/>
@@ -12164,7 +12164,7 @@
       </p:sp>
       <p:pic>
         <p:nvPicPr>
-          <p:cNvPr id="4" name="Picture 3" descr="cropped-logo-tajplast.png"/>
+          <p:cNvPr id="4" name="Picture 3" descr="logo-taj-seul.png"/>
           <p:cNvPicPr>
             <a:picLocks noChangeAspect="1"/>
           </p:cNvPicPr>
@@ -12178,8 +12178,8 @@
         </p:blipFill>
         <p:spPr>
           <a:xfrm>
-            <a:off x="10248119" y="220748"/>
-            <a:ext cx="1584000" cy="602503"/>
+            <a:off x="10248119" y="283729"/>
+            <a:ext cx="1584000" cy="440539"/>
           </a:xfrm>
           <a:prstGeom prst="rect">
             <a:avLst/>
@@ -12940,7 +12940,7 @@
       </p:sp>
       <p:pic>
         <p:nvPicPr>
-          <p:cNvPr id="4" name="Picture 3" descr="cropped-logo-tajplast.png"/>
+          <p:cNvPr id="4" name="Picture 3" descr="logo-taj-seul.png"/>
           <p:cNvPicPr>
             <a:picLocks noChangeAspect="1"/>
           </p:cNvPicPr>
@@ -12954,8 +12954,8 @@
         </p:blipFill>
         <p:spPr>
           <a:xfrm>
-            <a:off x="10248119" y="220748"/>
-            <a:ext cx="1584000" cy="602503"/>
+            <a:off x="10248119" y="283729"/>
+            <a:ext cx="1584000" cy="440539"/>
           </a:xfrm>
           <a:prstGeom prst="rect">
             <a:avLst/>
@@ -13955,7 +13955,7 @@
       </p:sp>
       <p:pic>
         <p:nvPicPr>
-          <p:cNvPr id="4" name="Picture 3" descr="cropped-logo-tajplast.png"/>
+          <p:cNvPr id="4" name="Picture 3" descr="logo-taj-seul.png"/>
           <p:cNvPicPr>
             <a:picLocks noChangeAspect="1"/>
           </p:cNvPicPr>
@@ -13969,8 +13969,8 @@
         </p:blipFill>
         <p:spPr>
           <a:xfrm>
-            <a:off x="10248119" y="220748"/>
-            <a:ext cx="1584000" cy="602503"/>
+            <a:off x="10248119" y="283729"/>
+            <a:ext cx="1584000" cy="440539"/>
           </a:xfrm>
           <a:prstGeom prst="rect">
             <a:avLst/>
@@ -15153,7 +15153,7 @@
       </p:sp>
       <p:pic>
         <p:nvPicPr>
-          <p:cNvPr id="4" name="Picture 3" descr="cropped-logo-tajplast.png"/>
+          <p:cNvPr id="4" name="Picture 3" descr="logo-taj-seul.png"/>
           <p:cNvPicPr>
             <a:picLocks noChangeAspect="1"/>
           </p:cNvPicPr>
@@ -15167,8 +15167,8 @@
         </p:blipFill>
         <p:spPr>
           <a:xfrm>
-            <a:off x="10248119" y="220748"/>
-            <a:ext cx="1584000" cy="602503"/>
+            <a:off x="10248119" y="283729"/>
+            <a:ext cx="1584000" cy="440539"/>
           </a:xfrm>
           <a:prstGeom prst="rect">
             <a:avLst/>
@@ -16695,7 +16695,7 @@
       </p:sp>
       <p:pic>
         <p:nvPicPr>
-          <p:cNvPr id="4" name="Picture 3" descr="cropped-logo-tajplast.png"/>
+          <p:cNvPr id="4" name="Picture 3" descr="logo-taj-seul.png"/>
           <p:cNvPicPr>
             <a:picLocks noChangeAspect="1"/>
           </p:cNvPicPr>
@@ -16709,8 +16709,8 @@
         </p:blipFill>
         <p:spPr>
           <a:xfrm>
-            <a:off x="10248119" y="220748"/>
-            <a:ext cx="1584000" cy="602503"/>
+            <a:off x="10248119" y="283729"/>
+            <a:ext cx="1584000" cy="440539"/>
           </a:xfrm>
           <a:prstGeom prst="rect">
             <a:avLst/>
